--- a/docs/pptx/auc3/ritu-auc3-adjcif-throm2.pptx
+++ b/docs/pptx/auc3/ritu-auc3-adjcif-throm2.pptx
@@ -2271,7 +2271,7 @@
           </p:nvSpPr>
           <p:spPr>
             <a:xfrm>
-              <a:off x="1035053" y="5196362"/>
+              <a:off x="1035053" y="5199049"/>
               <a:ext cx="7582157" cy="0"/>
             </a:xfrm>
             <a:custGeom>
@@ -2314,7 +2314,7 @@
           </p:nvSpPr>
           <p:spPr>
             <a:xfrm>
-              <a:off x="1035053" y="4428243"/>
+              <a:off x="1035053" y="4436303"/>
               <a:ext cx="7582157" cy="0"/>
             </a:xfrm>
             <a:custGeom>
@@ -2357,7 +2357,7 @@
           </p:nvSpPr>
           <p:spPr>
             <a:xfrm>
-              <a:off x="1035053" y="3660123"/>
+              <a:off x="1035053" y="3673557"/>
               <a:ext cx="7582157" cy="0"/>
             </a:xfrm>
             <a:custGeom>
@@ -2400,7 +2400,7 @@
           </p:nvSpPr>
           <p:spPr>
             <a:xfrm>
-              <a:off x="1035053" y="2892004"/>
+              <a:off x="1035053" y="2910812"/>
               <a:ext cx="7582157" cy="0"/>
             </a:xfrm>
             <a:custGeom>
@@ -2658,7 +2658,7 @@
           </p:nvSpPr>
           <p:spPr>
             <a:xfrm>
-              <a:off x="1035053" y="4812302"/>
+              <a:off x="1035053" y="4817676"/>
               <a:ext cx="7582157" cy="0"/>
             </a:xfrm>
             <a:custGeom>
@@ -2701,7 +2701,7 @@
           </p:nvSpPr>
           <p:spPr>
             <a:xfrm>
-              <a:off x="1035053" y="4044183"/>
+              <a:off x="1035053" y="4054930"/>
               <a:ext cx="7582157" cy="0"/>
             </a:xfrm>
             <a:custGeom>
@@ -2744,7 +2744,7 @@
           </p:nvSpPr>
           <p:spPr>
             <a:xfrm>
-              <a:off x="1035053" y="3276064"/>
+              <a:off x="1035053" y="3292185"/>
               <a:ext cx="7582157" cy="0"/>
             </a:xfrm>
             <a:custGeom>
@@ -2960,17 +2960,17 @@
           <p:spPr>
             <a:xfrm>
               <a:off x="1379697" y="4323273"/>
-              <a:ext cx="6892870" cy="1008862"/>
+              <a:ext cx="6892870" cy="1008861"/>
             </a:xfrm>
             <a:custGeom>
               <a:avLst/>
               <a:pathLst>
-                <a:path w="6892870" h="1008862">
+                <a:path w="6892870" h="1008861">
                   <a:moveTo>
-                    <a:pt x="0" y="1008862"/>
+                    <a:pt x="0" y="1008861"/>
                   </a:moveTo>
                   <a:lnTo>
-                    <a:pt x="1818951" y="1008862"/>
+                    <a:pt x="1818951" y="1008861"/>
                   </a:lnTo>
                   <a:lnTo>
                     <a:pt x="1818951" y="871691"/>
@@ -3039,23 +3039,23 @@
           <p:spPr>
             <a:xfrm>
               <a:off x="1379697" y="2861938"/>
-              <a:ext cx="6892870" cy="2141794"/>
+              <a:ext cx="6892870" cy="2141795"/>
             </a:xfrm>
             <a:custGeom>
               <a:avLst/>
               <a:pathLst>
-                <a:path w="6892870" h="2141794">
+                <a:path w="6892870" h="2141795">
                   <a:moveTo>
-                    <a:pt x="0" y="2141794"/>
+                    <a:pt x="0" y="2141795"/>
                   </a:moveTo>
                   <a:lnTo>
-                    <a:pt x="1818951" y="2141794"/>
-                  </a:lnTo>
-                  <a:lnTo>
-                    <a:pt x="1818951" y="1832353"/>
-                  </a:lnTo>
-                  <a:lnTo>
-                    <a:pt x="2584826" y="1832353"/>
+                    <a:pt x="1818951" y="2141795"/>
+                  </a:lnTo>
+                  <a:lnTo>
+                    <a:pt x="1818951" y="1832354"/>
+                  </a:lnTo>
+                  <a:lnTo>
+                    <a:pt x="2584826" y="1832354"/>
                   </a:lnTo>
                   <a:lnTo>
                     <a:pt x="2584826" y="1529033"/>
@@ -3064,10 +3064,10 @@
                     <a:pt x="3829372" y="1529033"/>
                   </a:lnTo>
                   <a:lnTo>
-                    <a:pt x="3829372" y="1212177"/>
-                  </a:lnTo>
-                  <a:lnTo>
-                    <a:pt x="4020841" y="1212177"/>
+                    <a:pt x="3829372" y="1212178"/>
+                  </a:lnTo>
+                  <a:lnTo>
+                    <a:pt x="4020841" y="1212178"/>
                   </a:lnTo>
                   <a:lnTo>
                     <a:pt x="4020841" y="903887"/>
@@ -3082,10 +3082,10 @@
                     <a:pt x="6701401" y="600243"/>
                   </a:lnTo>
                   <a:lnTo>
-                    <a:pt x="6701401" y="306961"/>
-                  </a:lnTo>
-                  <a:lnTo>
-                    <a:pt x="6892870" y="306961"/>
+                    <a:pt x="6701401" y="306962"/>
+                  </a:lnTo>
+                  <a:lnTo>
+                    <a:pt x="6892870" y="306962"/>
                   </a:lnTo>
                   <a:lnTo>
                     <a:pt x="6892870" y="0"/>
@@ -3163,7 +3163,7 @@
           </p:nvSpPr>
           <p:spPr>
             <a:xfrm>
-              <a:off x="692708" y="4772252"/>
+              <a:off x="692708" y="4777625"/>
               <a:ext cx="279714" cy="80101"/>
             </a:xfrm>
             <a:prstGeom prst="rect">
@@ -3209,7 +3209,7 @@
           </p:nvSpPr>
           <p:spPr>
             <a:xfrm>
-              <a:off x="692708" y="4004132"/>
+              <a:off x="692708" y="4014880"/>
               <a:ext cx="279714" cy="80101"/>
             </a:xfrm>
             <a:prstGeom prst="rect">
@@ -3255,7 +3255,7 @@
           </p:nvSpPr>
           <p:spPr>
             <a:xfrm>
-              <a:off x="692708" y="3236013"/>
+              <a:off x="692708" y="3252134"/>
               <a:ext cx="279714" cy="80101"/>
             </a:xfrm>
             <a:prstGeom prst="rect">
